--- a/documents/deck/sample_draft.pptx
+++ b/documents/deck/sample_draft.pptx
@@ -1408,7 +1408,7 @@
                 <a:ea typeface="Calibri" pitchFamily="34" charset="-122"/>
                 <a:cs typeface="Calibri" pitchFamily="34" charset="-120"/>
               </a:rPr>
-              <a:t>AI-powered insights untuk tim sales &amp; customer success</a:t>
+              <a:t>Insights yang dapat ditindaklanjuti, dalam hitungan jam.</a:t>
             </a:r>
             <a:endParaRPr lang="en-US" sz="1700" dirty="0"/>
           </a:p>
@@ -1564,7 +1564,7 @@
                 <a:ea typeface="Calibri" pitchFamily="34" charset="-122"/>
                 <a:cs typeface="Calibri" pitchFamily="34" charset="-120"/>
               </a:rPr>
-              <a:t>14 Mei 2026</a:t>
+              <a:t>15 Mei 2026</a:t>
             </a:r>
             <a:endParaRPr lang="en-US" sz="1600" dirty="0"/>
           </a:p>
@@ -1776,7 +1776,7 @@
         </p:nvSpPr>
         <p:spPr>
           <a:xfrm>
-            <a:off x="548640" y="1371600"/>
+            <a:off x="548640" y="1463040"/>
             <a:ext cx="11094415" cy="365760"/>
           </a:xfrm>
           <a:prstGeom prst="rect">
@@ -1789,11 +1789,11 @@
           <a:bodyPr wrap="square" rtlCol="0" anchor="ctr"/>
           <a:lstStyle/>
           <a:p>
-            <a:pPr indent="0" marL="0">
-              <a:buNone/>
-            </a:pPr>
-            <a:r>
-              <a:rPr lang="en-US" sz="1100" b="1" spc="500" kern="0" dirty="0">
+            <a:pPr algn="ctr" indent="0" marL="0">
+              <a:buNone/>
+            </a:pPr>
+            <a:r>
+              <a:rPr lang="en-US" sz="1200" b="1" spc="600" kern="0" dirty="0">
                 <a:solidFill>
                   <a:srgbClr val="2563EB"/>
                 </a:solidFill>
@@ -1803,7 +1803,7 @@
               </a:rPr>
               <a:t>BAGIAN 01</a:t>
             </a:r>
-            <a:endParaRPr lang="en-US" sz="1100" dirty="0"/>
+            <a:endParaRPr lang="en-US" sz="1200" dirty="0"/>
           </a:p>
         </p:txBody>
       </p:sp>
@@ -1815,8 +1815,47 @@
         </p:nvSpPr>
         <p:spPr>
           <a:xfrm>
-            <a:off x="548640" y="1920240"/>
-            <a:ext cx="11094415" cy="2286000"/>
+            <a:off x="548640" y="2194560"/>
+            <a:ext cx="11094415" cy="2377440"/>
+          </a:xfrm>
+          <a:prstGeom prst="rect">
+            <a:avLst/>
+          </a:prstGeom>
+          <a:noFill/>
+          <a:ln/>
+        </p:spPr>
+        <p:txBody>
+          <a:bodyPr wrap="square" rtlCol="0" anchor="ctr"/>
+          <a:lstStyle/>
+          <a:p>
+            <a:pPr algn="ctr" indent="0" marL="0">
+              <a:buNone/>
+            </a:pPr>
+            <a:r>
+              <a:rPr lang="en-US" sz="6400" b="1" dirty="0">
+                <a:solidFill>
+                  <a:srgbClr val="141B2E"/>
+                </a:solidFill>
+                <a:latin typeface="Calibri" pitchFamily="34" charset="0"/>
+                <a:ea typeface="Calibri" pitchFamily="34" charset="-122"/>
+                <a:cs typeface="Calibri" pitchFamily="34" charset="-120"/>
+              </a:rPr>
+              <a:t>Mengapa AI sekarang?</a:t>
+            </a:r>
+            <a:endParaRPr lang="en-US" sz="6400" dirty="0"/>
+          </a:p>
+        </p:txBody>
+      </p:sp>
+      <p:sp>
+        <p:nvSpPr>
+          <p:cNvPr id="9" name="Text 6"/>
+          <p:cNvSpPr/>
+          <p:nvPr/>
+        </p:nvSpPr>
+        <p:spPr>
+          <a:xfrm>
+            <a:off x="1371600" y="4846320"/>
+            <a:ext cx="9448495" cy="1097280"/>
           </a:xfrm>
           <a:prstGeom prst="rect">
             <a:avLst/>
@@ -1828,46 +1867,7 @@
           <a:bodyPr wrap="square" rtlCol="0" anchor="t"/>
           <a:lstStyle/>
           <a:p>
-            <a:pPr indent="0" marL="0">
-              <a:buNone/>
-            </a:pPr>
-            <a:r>
-              <a:rPr lang="en-US" sz="4800" b="1" dirty="0">
-                <a:solidFill>
-                  <a:srgbClr val="141B2E"/>
-                </a:solidFill>
-                <a:latin typeface="Calibri" pitchFamily="34" charset="0"/>
-                <a:ea typeface="Calibri" pitchFamily="34" charset="-122"/>
-                <a:cs typeface="Calibri" pitchFamily="34" charset="-120"/>
-              </a:rPr>
-              <a:t>Mengapa AI sekarang?</a:t>
-            </a:r>
-            <a:endParaRPr lang="en-US" sz="4800" dirty="0"/>
-          </a:p>
-        </p:txBody>
-      </p:sp>
-      <p:sp>
-        <p:nvSpPr>
-          <p:cNvPr id="9" name="Text 6"/>
-          <p:cNvSpPr/>
-          <p:nvPr/>
-        </p:nvSpPr>
-        <p:spPr>
-          <a:xfrm>
-            <a:off x="548640" y="4480560"/>
-            <a:ext cx="11094415" cy="1645920"/>
-          </a:xfrm>
-          <a:prstGeom prst="rect">
-            <a:avLst/>
-          </a:prstGeom>
-          <a:noFill/>
-          <a:ln/>
-        </p:spPr>
-        <p:txBody>
-          <a:bodyPr wrap="square" rtlCol="0" anchor="t"/>
-          <a:lstStyle/>
-          <a:p>
-            <a:pPr indent="0" marL="0">
+            <a:pPr algn="ctr" indent="0" marL="0">
               <a:buNone/>
             </a:pPr>
             <a:r>
@@ -1879,7 +1879,7 @@
                 <a:ea typeface="Calibri" pitchFamily="34" charset="-122"/>
                 <a:cs typeface="Calibri" pitchFamily="34" charset="-120"/>
               </a:rPr>
-              <a:t>Persaingan tidak lagi soal siapa yang punya data terbesar — tapi siapa yang dapat membaca, menafsirkan, dan bertindak atasnya tercepat.</a:t>
+              <a:t>Bukan soal data terbesar — tapi siapa bertindak tercepat.</a:t>
             </a:r>
             <a:endParaRPr lang="en-US" sz="1800" dirty="0"/>
           </a:p>
@@ -2091,8 +2091,8 @@
         </p:nvSpPr>
         <p:spPr>
           <a:xfrm>
-            <a:off x="548640" y="914400"/>
-            <a:ext cx="11094415" cy="640080"/>
+            <a:off x="548640" y="1005840"/>
+            <a:ext cx="11094415" cy="822960"/>
           </a:xfrm>
           <a:prstGeom prst="rect">
             <a:avLst/>
@@ -2104,11 +2104,128 @@
           <a:bodyPr wrap="square" rtlCol="0" anchor="ctr"/>
           <a:lstStyle/>
           <a:p>
+            <a:pPr algn="ctr" indent="0" marL="0">
+              <a:buNone/>
+            </a:pPr>
+            <a:r>
+              <a:rPr lang="en-US" sz="4400" b="1" dirty="0">
+                <a:solidFill>
+                  <a:srgbClr val="141B2E"/>
+                </a:solidFill>
+                <a:latin typeface="Calibri" pitchFamily="34" charset="0"/>
+                <a:ea typeface="Calibri" pitchFamily="34" charset="-122"/>
+                <a:cs typeface="Calibri" pitchFamily="34" charset="-120"/>
+              </a:rPr>
+              <a:t>Tiga pilar transformasi AI</a:t>
+            </a:r>
+            <a:endParaRPr lang="en-US" sz="4400" dirty="0"/>
+          </a:p>
+        </p:txBody>
+      </p:sp>
+      <p:sp>
+        <p:nvSpPr>
+          <p:cNvPr id="8" name="Text 5"/>
+          <p:cNvSpPr/>
+          <p:nvPr/>
+        </p:nvSpPr>
+        <p:spPr>
+          <a:xfrm>
+            <a:off x="1371600" y="1965960"/>
+            <a:ext cx="9448495" cy="457200"/>
+          </a:xfrm>
+          <a:prstGeom prst="rect">
+            <a:avLst/>
+          </a:prstGeom>
+          <a:noFill/>
+          <a:ln/>
+        </p:spPr>
+        <p:txBody>
+          <a:bodyPr wrap="square" rtlCol="0" anchor="ctr"/>
+          <a:lstStyle/>
+          <a:p>
+            <a:pPr algn="ctr" indent="0" marL="0">
+              <a:buNone/>
+            </a:pPr>
+            <a:r>
+              <a:rPr lang="en-US" sz="1600" dirty="0">
+                <a:solidFill>
+                  <a:srgbClr val="6E7990"/>
+                </a:solidFill>
+                <a:latin typeface="Calibri" pitchFamily="34" charset="0"/>
+                <a:ea typeface="Calibri" pitchFamily="34" charset="-122"/>
+                <a:cs typeface="Calibri" pitchFamily="34" charset="-120"/>
+              </a:rPr>
+              <a:t>Dari strategi sampai adopsi, sebagai satu sistem.</a:t>
+            </a:r>
+            <a:endParaRPr lang="en-US" sz="1600" dirty="0"/>
+          </a:p>
+        </p:txBody>
+      </p:sp>
+      <p:sp>
+        <p:nvSpPr>
+          <p:cNvPr id="9" name="Text 6"/>
+          <p:cNvSpPr/>
+          <p:nvPr/>
+        </p:nvSpPr>
+        <p:spPr>
+          <a:xfrm>
+            <a:off x="731520" y="3108960"/>
+            <a:ext cx="914400" cy="914400"/>
+          </a:xfrm>
+          <a:prstGeom prst="rect">
+            <a:avLst/>
+          </a:prstGeom>
+          <a:noFill/>
+          <a:ln/>
+        </p:spPr>
+        <p:txBody>
+          <a:bodyPr wrap="square" rtlCol="0" anchor="t"/>
+          <a:lstStyle/>
+          <a:p>
             <a:pPr indent="0" marL="0">
               <a:buNone/>
             </a:pPr>
             <a:r>
-              <a:rPr lang="en-US" sz="3000" b="1" dirty="0">
+              <a:rPr lang="en-US" sz="3200" b="1" dirty="0">
+                <a:solidFill>
+                  <a:srgbClr val="2563EB"/>
+                </a:solidFill>
+                <a:latin typeface="Calibri" pitchFamily="34" charset="0"/>
+                <a:ea typeface="Calibri" pitchFamily="34" charset="-122"/>
+                <a:cs typeface="Calibri" pitchFamily="34" charset="-120"/>
+              </a:rPr>
+              <a:t>01</a:t>
+            </a:r>
+            <a:endParaRPr lang="en-US" sz="3200" dirty="0"/>
+          </a:p>
+        </p:txBody>
+      </p:sp>
+      <p:sp>
+        <p:nvSpPr>
+          <p:cNvPr id="10" name="Text 7"/>
+          <p:cNvSpPr/>
+          <p:nvPr/>
+        </p:nvSpPr>
+        <p:spPr>
+          <a:xfrm>
+            <a:off x="1828800" y="3108960"/>
+            <a:ext cx="9814255" cy="411480"/>
+          </a:xfrm>
+          <a:prstGeom prst="rect">
+            <a:avLst/>
+          </a:prstGeom>
+          <a:noFill/>
+          <a:ln/>
+        </p:spPr>
+        <p:txBody>
+          <a:bodyPr wrap="square" rtlCol="0" anchor="t"/>
+          <a:lstStyle/>
+          <a:p>
+            <a:pPr indent="0" marL="0">
+              <a:buNone/>
+            </a:pPr>
+            <a:r>
+              <a:rPr lang="en-US" sz="2000" b="1" dirty="0">
                 <a:solidFill>
                   <a:srgbClr val="141B2E"/>
                 </a:solidFill>
@@ -2116,38 +2233,38 @@
                 <a:ea typeface="Calibri" pitchFamily="34" charset="-122"/>
                 <a:cs typeface="Calibri" pitchFamily="34" charset="-120"/>
               </a:rPr>
-              <a:t>Tiga pilar transformasi AI OpenCraft</a:t>
-            </a:r>
-            <a:endParaRPr lang="en-US" sz="3000" dirty="0"/>
-          </a:p>
-        </p:txBody>
-      </p:sp>
-      <p:sp>
-        <p:nvSpPr>
-          <p:cNvPr id="8" name="Text 5"/>
-          <p:cNvSpPr/>
-          <p:nvPr/>
-        </p:nvSpPr>
-        <p:spPr>
-          <a:xfrm>
-            <a:off x="548640" y="1691640"/>
-            <a:ext cx="11094415" cy="457200"/>
-          </a:xfrm>
-          <a:prstGeom prst="rect">
-            <a:avLst/>
-          </a:prstGeom>
-          <a:noFill/>
-          <a:ln/>
-        </p:spPr>
-        <p:txBody>
-          <a:bodyPr wrap="square" rtlCol="0" anchor="ctr"/>
+              <a:t>Strategi</a:t>
+            </a:r>
+            <a:endParaRPr lang="en-US" sz="2000" dirty="0"/>
+          </a:p>
+        </p:txBody>
+      </p:sp>
+      <p:sp>
+        <p:nvSpPr>
+          <p:cNvPr id="11" name="Text 8"/>
+          <p:cNvSpPr/>
+          <p:nvPr/>
+        </p:nvSpPr>
+        <p:spPr>
+          <a:xfrm>
+            <a:off x="1828800" y="3520440"/>
+            <a:ext cx="9814255" cy="457200"/>
+          </a:xfrm>
+          <a:prstGeom prst="rect">
+            <a:avLst/>
+          </a:prstGeom>
+          <a:noFill/>
+          <a:ln/>
+        </p:spPr>
+        <p:txBody>
+          <a:bodyPr wrap="square" rtlCol="0" anchor="t"/>
           <a:lstStyle/>
           <a:p>
             <a:pPr indent="0" marL="0">
               <a:buNone/>
             </a:pPr>
             <a:r>
-              <a:rPr lang="en-US" sz="1400" dirty="0">
+              <a:rPr lang="en-US" sz="1300" dirty="0">
                 <a:solidFill>
                   <a:srgbClr val="6E7990"/>
                 </a:solidFill>
@@ -2155,22 +2272,22 @@
                 <a:ea typeface="Calibri" pitchFamily="34" charset="-122"/>
                 <a:cs typeface="Calibri" pitchFamily="34" charset="-120"/>
               </a:rPr>
-              <a:t>Mulai dari strategi, eksekusi, hingga adopsi — sebagai satu sistem.</a:t>
-            </a:r>
-            <a:endParaRPr lang="en-US" sz="1400" dirty="0"/>
-          </a:p>
-        </p:txBody>
-      </p:sp>
-      <p:sp>
-        <p:nvSpPr>
-          <p:cNvPr id="9" name="Text 6"/>
-          <p:cNvSpPr/>
-          <p:nvPr/>
-        </p:nvSpPr>
-        <p:spPr>
-          <a:xfrm>
-            <a:off x="548640" y="2560320"/>
-            <a:ext cx="822960" cy="1005840"/>
+              <a:t>Roadmap berbasis value.</a:t>
+            </a:r>
+            <a:endParaRPr lang="en-US" sz="1300" dirty="0"/>
+          </a:p>
+        </p:txBody>
+      </p:sp>
+      <p:sp>
+        <p:nvSpPr>
+          <p:cNvPr id="12" name="Text 9"/>
+          <p:cNvSpPr/>
+          <p:nvPr/>
+        </p:nvSpPr>
+        <p:spPr>
+          <a:xfrm>
+            <a:off x="731520" y="4023360"/>
+            <a:ext cx="914400" cy="914400"/>
           </a:xfrm>
           <a:prstGeom prst="rect">
             <a:avLst/>
@@ -2186,7 +2303,7 @@
               <a:buNone/>
             </a:pPr>
             <a:r>
-              <a:rPr lang="en-US" sz="2200" b="1" dirty="0">
+              <a:rPr lang="en-US" sz="3200" b="1" dirty="0">
                 <a:solidFill>
                   <a:srgbClr val="2563EB"/>
                 </a:solidFill>
@@ -2194,22 +2311,22 @@
                 <a:ea typeface="Calibri" pitchFamily="34" charset="-122"/>
                 <a:cs typeface="Calibri" pitchFamily="34" charset="-120"/>
               </a:rPr>
-              <a:t>01</a:t>
-            </a:r>
-            <a:endParaRPr lang="en-US" sz="2200" dirty="0"/>
-          </a:p>
-        </p:txBody>
-      </p:sp>
-      <p:sp>
-        <p:nvSpPr>
-          <p:cNvPr id="10" name="Text 7"/>
-          <p:cNvSpPr/>
-          <p:nvPr/>
-        </p:nvSpPr>
-        <p:spPr>
-          <a:xfrm>
-            <a:off x="1463040" y="2560320"/>
-            <a:ext cx="10180015" cy="365760"/>
+              <a:t>02</a:t>
+            </a:r>
+            <a:endParaRPr lang="en-US" sz="3200" dirty="0"/>
+          </a:p>
+        </p:txBody>
+      </p:sp>
+      <p:sp>
+        <p:nvSpPr>
+          <p:cNvPr id="13" name="Text 10"/>
+          <p:cNvSpPr/>
+          <p:nvPr/>
+        </p:nvSpPr>
+        <p:spPr>
+          <a:xfrm>
+            <a:off x="1828800" y="4023360"/>
+            <a:ext cx="9814255" cy="411480"/>
           </a:xfrm>
           <a:prstGeom prst="rect">
             <a:avLst/>
@@ -2225,7 +2342,7 @@
               <a:buNone/>
             </a:pPr>
             <a:r>
-              <a:rPr lang="en-US" sz="1600" b="1" dirty="0">
+              <a:rPr lang="en-US" sz="2000" b="1" dirty="0">
                 <a:solidFill>
                   <a:srgbClr val="141B2E"/>
                 </a:solidFill>
@@ -2233,22 +2350,22 @@
                 <a:ea typeface="Calibri" pitchFamily="34" charset="-122"/>
                 <a:cs typeface="Calibri" pitchFamily="34" charset="-120"/>
               </a:rPr>
-              <a:t>AI Strategy</a:t>
-            </a:r>
-            <a:endParaRPr lang="en-US" sz="1600" dirty="0"/>
-          </a:p>
-        </p:txBody>
-      </p:sp>
-      <p:sp>
-        <p:nvSpPr>
-          <p:cNvPr id="11" name="Text 8"/>
-          <p:cNvSpPr/>
-          <p:nvPr/>
-        </p:nvSpPr>
-        <p:spPr>
-          <a:xfrm>
-            <a:off x="1463040" y="2926080"/>
-            <a:ext cx="10180015" cy="548640"/>
+              <a:t>Custom AI</a:t>
+            </a:r>
+            <a:endParaRPr lang="en-US" sz="2000" dirty="0"/>
+          </a:p>
+        </p:txBody>
+      </p:sp>
+      <p:sp>
+        <p:nvSpPr>
+          <p:cNvPr id="14" name="Text 11"/>
+          <p:cNvSpPr/>
+          <p:nvPr/>
+        </p:nvSpPr>
+        <p:spPr>
+          <a:xfrm>
+            <a:off x="1828800" y="4434840"/>
+            <a:ext cx="9814255" cy="457200"/>
           </a:xfrm>
           <a:prstGeom prst="rect">
             <a:avLst/>
@@ -2264,7 +2381,7 @@
               <a:buNone/>
             </a:pPr>
             <a:r>
-              <a:rPr lang="en-US" sz="1200" dirty="0">
+              <a:rPr lang="en-US" sz="1300" dirty="0">
                 <a:solidFill>
                   <a:srgbClr val="6E7990"/>
                 </a:solidFill>
@@ -2272,22 +2389,22 @@
                 <a:ea typeface="Calibri" pitchFamily="34" charset="-122"/>
                 <a:cs typeface="Calibri" pitchFamily="34" charset="-120"/>
               </a:rPr>
-              <a:t>Roadmap dan prioritization dari business value, bukan dari hype.</a:t>
-            </a:r>
-            <a:endParaRPr lang="en-US" sz="1200" dirty="0"/>
-          </a:p>
-        </p:txBody>
-      </p:sp>
-      <p:sp>
-        <p:nvSpPr>
-          <p:cNvPr id="12" name="Text 9"/>
-          <p:cNvSpPr/>
-          <p:nvPr/>
-        </p:nvSpPr>
-        <p:spPr>
-          <a:xfrm>
-            <a:off x="548640" y="3566160"/>
-            <a:ext cx="822960" cy="1005840"/>
+              <a:t>LLM dan agent untuk workflow Anda.</a:t>
+            </a:r>
+            <a:endParaRPr lang="en-US" sz="1300" dirty="0"/>
+          </a:p>
+        </p:txBody>
+      </p:sp>
+      <p:sp>
+        <p:nvSpPr>
+          <p:cNvPr id="15" name="Text 12"/>
+          <p:cNvSpPr/>
+          <p:nvPr/>
+        </p:nvSpPr>
+        <p:spPr>
+          <a:xfrm>
+            <a:off x="731520" y="4937760"/>
+            <a:ext cx="914400" cy="914400"/>
           </a:xfrm>
           <a:prstGeom prst="rect">
             <a:avLst/>
@@ -2303,7 +2420,7 @@
               <a:buNone/>
             </a:pPr>
             <a:r>
-              <a:rPr lang="en-US" sz="2200" b="1" dirty="0">
+              <a:rPr lang="en-US" sz="3200" b="1" dirty="0">
                 <a:solidFill>
                   <a:srgbClr val="2563EB"/>
                 </a:solidFill>
@@ -2311,22 +2428,22 @@
                 <a:ea typeface="Calibri" pitchFamily="34" charset="-122"/>
                 <a:cs typeface="Calibri" pitchFamily="34" charset="-120"/>
               </a:rPr>
-              <a:t>02</a:t>
-            </a:r>
-            <a:endParaRPr lang="en-US" sz="2200" dirty="0"/>
-          </a:p>
-        </p:txBody>
-      </p:sp>
-      <p:sp>
-        <p:nvSpPr>
-          <p:cNvPr id="13" name="Text 10"/>
-          <p:cNvSpPr/>
-          <p:nvPr/>
-        </p:nvSpPr>
-        <p:spPr>
-          <a:xfrm>
-            <a:off x="1463040" y="3566160"/>
-            <a:ext cx="10180015" cy="365760"/>
+              <a:t>03</a:t>
+            </a:r>
+            <a:endParaRPr lang="en-US" sz="3200" dirty="0"/>
+          </a:p>
+        </p:txBody>
+      </p:sp>
+      <p:sp>
+        <p:nvSpPr>
+          <p:cNvPr id="16" name="Text 13"/>
+          <p:cNvSpPr/>
+          <p:nvPr/>
+        </p:nvSpPr>
+        <p:spPr>
+          <a:xfrm>
+            <a:off x="1828800" y="4937760"/>
+            <a:ext cx="9814255" cy="411480"/>
           </a:xfrm>
           <a:prstGeom prst="rect">
             <a:avLst/>
@@ -2342,7 +2459,7 @@
               <a:buNone/>
             </a:pPr>
             <a:r>
-              <a:rPr lang="en-US" sz="1600" b="1" dirty="0">
+              <a:rPr lang="en-US" sz="2000" b="1" dirty="0">
                 <a:solidFill>
                   <a:srgbClr val="141B2E"/>
                 </a:solidFill>
@@ -2350,22 +2467,22 @@
                 <a:ea typeface="Calibri" pitchFamily="34" charset="-122"/>
                 <a:cs typeface="Calibri" pitchFamily="34" charset="-120"/>
               </a:rPr>
-              <a:t>Custom AI Build</a:t>
-            </a:r>
-            <a:endParaRPr lang="en-US" sz="1600" dirty="0"/>
-          </a:p>
-        </p:txBody>
-      </p:sp>
-      <p:sp>
-        <p:nvSpPr>
-          <p:cNvPr id="14" name="Text 11"/>
-          <p:cNvSpPr/>
-          <p:nvPr/>
-        </p:nvSpPr>
-        <p:spPr>
-          <a:xfrm>
-            <a:off x="1463040" y="3931920"/>
-            <a:ext cx="10180015" cy="548640"/>
+              <a:t>Enablement</a:t>
+            </a:r>
+            <a:endParaRPr lang="en-US" sz="2000" dirty="0"/>
+          </a:p>
+        </p:txBody>
+      </p:sp>
+      <p:sp>
+        <p:nvSpPr>
+          <p:cNvPr id="17" name="Text 14"/>
+          <p:cNvSpPr/>
+          <p:nvPr/>
+        </p:nvSpPr>
+        <p:spPr>
+          <a:xfrm>
+            <a:off x="1828800" y="5349240"/>
+            <a:ext cx="9814255" cy="457200"/>
           </a:xfrm>
           <a:prstGeom prst="rect">
             <a:avLst/>
@@ -2381,7 +2498,7 @@
               <a:buNone/>
             </a:pPr>
             <a:r>
-              <a:rPr lang="en-US" sz="1200" dirty="0">
+              <a:rPr lang="en-US" sz="1300" dirty="0">
                 <a:solidFill>
                   <a:srgbClr val="6E7990"/>
                 </a:solidFill>
@@ -2389,126 +2506,9 @@
                 <a:ea typeface="Calibri" pitchFamily="34" charset="-122"/>
                 <a:cs typeface="Calibri" pitchFamily="34" charset="-120"/>
               </a:rPr>
-              <a:t>Custom LLM, agent, RAG — dirancang untuk workflow Anda.</a:t>
-            </a:r>
-            <a:endParaRPr lang="en-US" sz="1200" dirty="0"/>
-          </a:p>
-        </p:txBody>
-      </p:sp>
-      <p:sp>
-        <p:nvSpPr>
-          <p:cNvPr id="15" name="Text 12"/>
-          <p:cNvSpPr/>
-          <p:nvPr/>
-        </p:nvSpPr>
-        <p:spPr>
-          <a:xfrm>
-            <a:off x="548640" y="4572000"/>
-            <a:ext cx="822960" cy="1005840"/>
-          </a:xfrm>
-          <a:prstGeom prst="rect">
-            <a:avLst/>
-          </a:prstGeom>
-          <a:noFill/>
-          <a:ln/>
-        </p:spPr>
-        <p:txBody>
-          <a:bodyPr wrap="square" rtlCol="0" anchor="t"/>
-          <a:lstStyle/>
-          <a:p>
-            <a:pPr indent="0" marL="0">
-              <a:buNone/>
-            </a:pPr>
-            <a:r>
-              <a:rPr lang="en-US" sz="2200" b="1" dirty="0">
-                <a:solidFill>
-                  <a:srgbClr val="2563EB"/>
-                </a:solidFill>
-                <a:latin typeface="Calibri" pitchFamily="34" charset="0"/>
-                <a:ea typeface="Calibri" pitchFamily="34" charset="-122"/>
-                <a:cs typeface="Calibri" pitchFamily="34" charset="-120"/>
-              </a:rPr>
-              <a:t>03</a:t>
-            </a:r>
-            <a:endParaRPr lang="en-US" sz="2200" dirty="0"/>
-          </a:p>
-        </p:txBody>
-      </p:sp>
-      <p:sp>
-        <p:nvSpPr>
-          <p:cNvPr id="16" name="Text 13"/>
-          <p:cNvSpPr/>
-          <p:nvPr/>
-        </p:nvSpPr>
-        <p:spPr>
-          <a:xfrm>
-            <a:off x="1463040" y="4572000"/>
-            <a:ext cx="10180015" cy="365760"/>
-          </a:xfrm>
-          <a:prstGeom prst="rect">
-            <a:avLst/>
-          </a:prstGeom>
-          <a:noFill/>
-          <a:ln/>
-        </p:spPr>
-        <p:txBody>
-          <a:bodyPr wrap="square" rtlCol="0" anchor="t"/>
-          <a:lstStyle/>
-          <a:p>
-            <a:pPr indent="0" marL="0">
-              <a:buNone/>
-            </a:pPr>
-            <a:r>
-              <a:rPr lang="en-US" sz="1600" b="1" dirty="0">
-                <a:solidFill>
-                  <a:srgbClr val="141B2E"/>
-                </a:solidFill>
-                <a:latin typeface="Calibri" pitchFamily="34" charset="0"/>
-                <a:ea typeface="Calibri" pitchFamily="34" charset="-122"/>
-                <a:cs typeface="Calibri" pitchFamily="34" charset="-120"/>
-              </a:rPr>
-              <a:t>Enablement</a:t>
-            </a:r>
-            <a:endParaRPr lang="en-US" sz="1600" dirty="0"/>
-          </a:p>
-        </p:txBody>
-      </p:sp>
-      <p:sp>
-        <p:nvSpPr>
-          <p:cNvPr id="17" name="Text 14"/>
-          <p:cNvSpPr/>
-          <p:nvPr/>
-        </p:nvSpPr>
-        <p:spPr>
-          <a:xfrm>
-            <a:off x="1463040" y="4937760"/>
-            <a:ext cx="10180015" cy="548640"/>
-          </a:xfrm>
-          <a:prstGeom prst="rect">
-            <a:avLst/>
-          </a:prstGeom>
-          <a:noFill/>
-          <a:ln/>
-        </p:spPr>
-        <p:txBody>
-          <a:bodyPr wrap="square" rtlCol="0" anchor="t"/>
-          <a:lstStyle/>
-          <a:p>
-            <a:pPr indent="0" marL="0">
-              <a:buNone/>
-            </a:pPr>
-            <a:r>
-              <a:rPr lang="en-US" sz="1200" dirty="0">
-                <a:solidFill>
-                  <a:srgbClr val="6E7990"/>
-                </a:solidFill>
-                <a:latin typeface="Calibri" pitchFamily="34" charset="0"/>
-                <a:ea typeface="Calibri" pitchFamily="34" charset="-122"/>
-                <a:cs typeface="Calibri" pitchFamily="34" charset="-120"/>
-              </a:rPr>
-              <a:t>Tim internal Anda jadi mandiri — bukan ketergantungan vendor.</a:t>
-            </a:r>
-            <a:endParaRPr lang="en-US" sz="1200" dirty="0"/>
+              <a:t>Tim Anda jadi mandiri.</a:t>
+            </a:r>
+            <a:endParaRPr lang="en-US" sz="1300" dirty="0"/>
           </a:p>
         </p:txBody>
       </p:sp>
@@ -2718,7 +2718,7 @@
         </p:nvSpPr>
         <p:spPr>
           <a:xfrm>
-            <a:off x="548640" y="1371600"/>
+            <a:off x="548640" y="1463040"/>
             <a:ext cx="11094415" cy="365760"/>
           </a:xfrm>
           <a:prstGeom prst="rect">
@@ -2731,11 +2731,11 @@
           <a:bodyPr wrap="square" rtlCol="0" anchor="ctr"/>
           <a:lstStyle/>
           <a:p>
-            <a:pPr indent="0" marL="0">
-              <a:buNone/>
-            </a:pPr>
-            <a:r>
-              <a:rPr lang="en-US" sz="1100" b="1" spc="500" kern="0" dirty="0">
+            <a:pPr algn="ctr" indent="0" marL="0">
+              <a:buNone/>
+            </a:pPr>
+            <a:r>
+              <a:rPr lang="en-US" sz="1200" b="1" spc="600" kern="0" dirty="0">
                 <a:solidFill>
                   <a:srgbClr val="2563EB"/>
                 </a:solidFill>
@@ -2745,7 +2745,7 @@
               </a:rPr>
               <a:t>BAGIAN 02</a:t>
             </a:r>
-            <a:endParaRPr lang="en-US" sz="1100" dirty="0"/>
+            <a:endParaRPr lang="en-US" sz="1200" dirty="0"/>
           </a:p>
         </p:txBody>
       </p:sp>
@@ -2757,8 +2757,47 @@
         </p:nvSpPr>
         <p:spPr>
           <a:xfrm>
-            <a:off x="548640" y="1920240"/>
-            <a:ext cx="11094415" cy="2286000"/>
+            <a:off x="548640" y="2194560"/>
+            <a:ext cx="11094415" cy="2377440"/>
+          </a:xfrm>
+          <a:prstGeom prst="rect">
+            <a:avLst/>
+          </a:prstGeom>
+          <a:noFill/>
+          <a:ln/>
+        </p:spPr>
+        <p:txBody>
+          <a:bodyPr wrap="square" rtlCol="0" anchor="ctr"/>
+          <a:lstStyle/>
+          <a:p>
+            <a:pPr algn="ctr" indent="0" marL="0">
+              <a:buNone/>
+            </a:pPr>
+            <a:r>
+              <a:rPr lang="en-US" sz="6400" b="1" dirty="0">
+                <a:solidFill>
+                  <a:srgbClr val="141B2E"/>
+                </a:solidFill>
+                <a:latin typeface="Calibri" pitchFamily="34" charset="0"/>
+                <a:ea typeface="Calibri" pitchFamily="34" charset="-122"/>
+                <a:cs typeface="Calibri" pitchFamily="34" charset="-120"/>
+              </a:rPr>
+              <a:t>Customer Intelligence Platform.</a:t>
+            </a:r>
+            <a:endParaRPr lang="en-US" sz="6400" dirty="0"/>
+          </a:p>
+        </p:txBody>
+      </p:sp>
+      <p:sp>
+        <p:nvSpPr>
+          <p:cNvPr id="9" name="Text 6"/>
+          <p:cNvSpPr/>
+          <p:nvPr/>
+        </p:nvSpPr>
+        <p:spPr>
+          <a:xfrm>
+            <a:off x="1371600" y="4846320"/>
+            <a:ext cx="9448495" cy="1097280"/>
           </a:xfrm>
           <a:prstGeom prst="rect">
             <a:avLst/>
@@ -2770,46 +2809,7 @@
           <a:bodyPr wrap="square" rtlCol="0" anchor="t"/>
           <a:lstStyle/>
           <a:p>
-            <a:pPr indent="0" marL="0">
-              <a:buNone/>
-            </a:pPr>
-            <a:r>
-              <a:rPr lang="en-US" sz="4800" b="1" dirty="0">
-                <a:solidFill>
-                  <a:srgbClr val="141B2E"/>
-                </a:solidFill>
-                <a:latin typeface="Calibri" pitchFamily="34" charset="0"/>
-                <a:ea typeface="Calibri" pitchFamily="34" charset="-122"/>
-                <a:cs typeface="Calibri" pitchFamily="34" charset="-120"/>
-              </a:rPr>
-              <a:t>Customer Intelligence Platform.</a:t>
-            </a:r>
-            <a:endParaRPr lang="en-US" sz="4800" dirty="0"/>
-          </a:p>
-        </p:txBody>
-      </p:sp>
-      <p:sp>
-        <p:nvSpPr>
-          <p:cNvPr id="9" name="Text 6"/>
-          <p:cNvSpPr/>
-          <p:nvPr/>
-        </p:nvSpPr>
-        <p:spPr>
-          <a:xfrm>
-            <a:off x="548640" y="4480560"/>
-            <a:ext cx="11094415" cy="1645920"/>
-          </a:xfrm>
-          <a:prstGeom prst="rect">
-            <a:avLst/>
-          </a:prstGeom>
-          <a:noFill/>
-          <a:ln/>
-        </p:spPr>
-        <p:txBody>
-          <a:bodyPr wrap="square" rtlCol="0" anchor="t"/>
-          <a:lstStyle/>
-          <a:p>
-            <a:pPr indent="0" marL="0">
+            <a:pPr algn="ctr" indent="0" marL="0">
               <a:buNone/>
             </a:pPr>
             <a:r>
@@ -2821,7 +2821,7 @@
                 <a:ea typeface="Calibri" pitchFamily="34" charset="-122"/>
                 <a:cs typeface="Calibri" pitchFamily="34" charset="-120"/>
               </a:rPr>
-              <a:t>Mengubah catatan percakapan, tiket, dan transaksi menjadi keputusan komersial yang aksi-nyata.</a:t>
+              <a:t>Percakapan, tiket, transaksi → keputusan komersial.</a:t>
             </a:r>
             <a:endParaRPr lang="en-US" sz="1800" dirty="0"/>
           </a:p>
@@ -2956,7 +2956,7 @@
                 <a:ea typeface="Calibri" pitchFamily="34" charset="-122"/>
                 <a:cs typeface="Calibri" pitchFamily="34" charset="-120"/>
               </a:rPr>
-              <a:t>Mari berkolaborasi untuk transformasi AI bisnis Anda.</a:t>
+              <a:t>Mari mulai transformasi AI Anda.</a:t>
             </a:r>
             <a:endParaRPr lang="en-US" sz="1600" dirty="0"/>
           </a:p>
